--- a/books/Refactoring/session/Refactoring.pptx
+++ b/books/Refactoring/session/Refactoring.pptx
@@ -206,7 +206,7 @@
           <a:p>
             <a:fld id="{3D7383F5-6C25-4144-BB9C-7D6DC74B2771}" type="datetimeFigureOut">
               <a:rPr lang="en-CN" smtClean="0"/>
-              <a:t>2020/10/15</a:t>
+              <a:t>2021/5/17</a:t>
             </a:fld>
             <a:endParaRPr lang="en-CN"/>
           </a:p>
@@ -623,7 +623,7 @@
           <a:p>
             <a:fld id="{CE81EC24-67D7-F647-A9BD-542708036C5D}" type="datetimeFigureOut">
               <a:rPr lang="en-CN" smtClean="0"/>
-              <a:t>2020/10/15</a:t>
+              <a:t>2021/5/17</a:t>
             </a:fld>
             <a:endParaRPr lang="en-CN"/>
           </a:p>
@@ -823,7 +823,7 @@
           <a:p>
             <a:fld id="{CE81EC24-67D7-F647-A9BD-542708036C5D}" type="datetimeFigureOut">
               <a:rPr lang="en-CN" smtClean="0"/>
-              <a:t>2020/10/15</a:t>
+              <a:t>2021/5/17</a:t>
             </a:fld>
             <a:endParaRPr lang="en-CN"/>
           </a:p>
@@ -1033,7 +1033,7 @@
           <a:p>
             <a:fld id="{CE81EC24-67D7-F647-A9BD-542708036C5D}" type="datetimeFigureOut">
               <a:rPr lang="en-CN" smtClean="0"/>
-              <a:t>2020/10/15</a:t>
+              <a:t>2021/5/17</a:t>
             </a:fld>
             <a:endParaRPr lang="en-CN"/>
           </a:p>
@@ -1233,7 +1233,7 @@
           <a:p>
             <a:fld id="{CE81EC24-67D7-F647-A9BD-542708036C5D}" type="datetimeFigureOut">
               <a:rPr lang="en-CN" smtClean="0"/>
-              <a:t>2020/10/15</a:t>
+              <a:t>2021/5/17</a:t>
             </a:fld>
             <a:endParaRPr lang="en-CN"/>
           </a:p>
@@ -1509,7 +1509,7 @@
           <a:p>
             <a:fld id="{CE81EC24-67D7-F647-A9BD-542708036C5D}" type="datetimeFigureOut">
               <a:rPr lang="en-CN" smtClean="0"/>
-              <a:t>2020/10/15</a:t>
+              <a:t>2021/5/17</a:t>
             </a:fld>
             <a:endParaRPr lang="en-CN"/>
           </a:p>
@@ -1777,7 +1777,7 @@
           <a:p>
             <a:fld id="{CE81EC24-67D7-F647-A9BD-542708036C5D}" type="datetimeFigureOut">
               <a:rPr lang="en-CN" smtClean="0"/>
-              <a:t>2020/10/15</a:t>
+              <a:t>2021/5/17</a:t>
             </a:fld>
             <a:endParaRPr lang="en-CN"/>
           </a:p>
@@ -2192,7 +2192,7 @@
           <a:p>
             <a:fld id="{CE81EC24-67D7-F647-A9BD-542708036C5D}" type="datetimeFigureOut">
               <a:rPr lang="en-CN" smtClean="0"/>
-              <a:t>2020/10/15</a:t>
+              <a:t>2021/5/17</a:t>
             </a:fld>
             <a:endParaRPr lang="en-CN"/>
           </a:p>
@@ -2334,7 +2334,7 @@
           <a:p>
             <a:fld id="{CE81EC24-67D7-F647-A9BD-542708036C5D}" type="datetimeFigureOut">
               <a:rPr lang="en-CN" smtClean="0"/>
-              <a:t>2020/10/15</a:t>
+              <a:t>2021/5/17</a:t>
             </a:fld>
             <a:endParaRPr lang="en-CN"/>
           </a:p>
@@ -2447,7 +2447,7 @@
           <a:p>
             <a:fld id="{CE81EC24-67D7-F647-A9BD-542708036C5D}" type="datetimeFigureOut">
               <a:rPr lang="en-CN" smtClean="0"/>
-              <a:t>2020/10/15</a:t>
+              <a:t>2021/5/17</a:t>
             </a:fld>
             <a:endParaRPr lang="en-CN"/>
           </a:p>
@@ -2760,7 +2760,7 @@
           <a:p>
             <a:fld id="{CE81EC24-67D7-F647-A9BD-542708036C5D}" type="datetimeFigureOut">
               <a:rPr lang="en-CN" smtClean="0"/>
-              <a:t>2020/10/15</a:t>
+              <a:t>2021/5/17</a:t>
             </a:fld>
             <a:endParaRPr lang="en-CN"/>
           </a:p>
@@ -3049,7 +3049,7 @@
           <a:p>
             <a:fld id="{CE81EC24-67D7-F647-A9BD-542708036C5D}" type="datetimeFigureOut">
               <a:rPr lang="en-CN" smtClean="0"/>
-              <a:t>2020/10/15</a:t>
+              <a:t>2021/5/17</a:t>
             </a:fld>
             <a:endParaRPr lang="en-CN"/>
           </a:p>
@@ -3292,7 +3292,7 @@
           <a:p>
             <a:fld id="{CE81EC24-67D7-F647-A9BD-542708036C5D}" type="datetimeFigureOut">
               <a:rPr lang="en-CN" smtClean="0"/>
-              <a:t>2020/10/15</a:t>
+              <a:t>2021/5/17</a:t>
             </a:fld>
             <a:endParaRPr lang="en-CN"/>
           </a:p>
@@ -4656,18 +4656,7 @@
               <a:solidFill>
                 <a:srgbClr val="FF0000"/>
               </a:solidFill>
-              <a:effectLst/>
             </a:endParaRPr>
-          </a:p>
-          <a:p>
-            <a:r>
-              <a:rPr lang="en-US" altLang="zh-CN" dirty="0">
-                <a:solidFill>
-                  <a:srgbClr val="FF0000"/>
-                </a:solidFill>
-              </a:rPr>
-              <a:t>+</a:t>
-            </a:r>
           </a:p>
           <a:p>
             <a:r>
